--- a/presentacion/GC-F-004FormatoPlantillaPresentacionPowerPointV10(1)(1).pptx
+++ b/presentacion/GC-F-004FormatoPlantillaPresentacionPowerPointV10(1)(1).pptx
@@ -5,10 +5,10 @@
     <p:sldMasterId id="2147483648" r:id="rId1"/>
   </p:sldMasterIdLst>
   <p:notesMasterIdLst>
-    <p:notesMasterId r:id="rId10"/>
+    <p:notesMasterId r:id="rId11"/>
   </p:notesMasterIdLst>
   <p:handoutMasterIdLst>
-    <p:handoutMasterId r:id="rId11"/>
+    <p:handoutMasterId r:id="rId12"/>
   </p:handoutMasterIdLst>
   <p:sldIdLst>
     <p:sldId id="538" r:id="rId2"/>
@@ -16,9 +16,10 @@
     <p:sldId id="541" r:id="rId4"/>
     <p:sldId id="537" r:id="rId5"/>
     <p:sldId id="542" r:id="rId6"/>
-    <p:sldId id="536" r:id="rId7"/>
-    <p:sldId id="532" r:id="rId8"/>
-    <p:sldId id="531" r:id="rId9"/>
+    <p:sldId id="543" r:id="rId7"/>
+    <p:sldId id="536" r:id="rId8"/>
+    <p:sldId id="532" r:id="rId9"/>
+    <p:sldId id="531" r:id="rId10"/>
   </p:sldIdLst>
   <p:sldSz cx="12192000" cy="6858000"/>
   <p:notesSz cx="6858000" cy="9144000"/>
@@ -238,7 +239,7 @@
           <a:p>
             <a:fld id="{88369B9F-131C-2846-AB8F-CEE154B4CAEB}" type="datetimeFigureOut">
               <a:rPr lang="es-CO" smtClean="0"/>
-              <a:t>27/08/2025</a:t>
+              <a:t>30/08/2025</a:t>
             </a:fld>
             <a:endParaRPr lang="es-CO"/>
           </a:p>
@@ -415,7 +416,7 @@
           <a:p>
             <a:fld id="{9660CB96-A603-FF42-AE46-F5F75F80A67B}" type="datetimeFigureOut">
               <a:rPr lang="es-CO" smtClean="0"/>
-              <a:t>27/08/2025</a:t>
+              <a:t>30/08/2025</a:t>
             </a:fld>
             <a:endParaRPr lang="es-CO"/>
           </a:p>
@@ -832,7 +833,7 @@
           <a:p>
             <a:fld id="{BD986248-06F7-A441-A47A-264EBD310E11}" type="datetimeFigureOut">
               <a:rPr lang="es-CO" smtClean="0"/>
-              <a:t>27/08/2025</a:t>
+              <a:t>30/08/2025</a:t>
             </a:fld>
             <a:endParaRPr lang="es-CO"/>
           </a:p>
@@ -1032,7 +1033,7 @@
           <a:p>
             <a:fld id="{BD986248-06F7-A441-A47A-264EBD310E11}" type="datetimeFigureOut">
               <a:rPr lang="es-CO" smtClean="0"/>
-              <a:t>27/08/2025</a:t>
+              <a:t>30/08/2025</a:t>
             </a:fld>
             <a:endParaRPr lang="es-CO"/>
           </a:p>
@@ -1242,7 +1243,7 @@
           <a:p>
             <a:fld id="{BD986248-06F7-A441-A47A-264EBD310E11}" type="datetimeFigureOut">
               <a:rPr lang="es-CO" smtClean="0"/>
-              <a:t>27/08/2025</a:t>
+              <a:t>30/08/2025</a:t>
             </a:fld>
             <a:endParaRPr lang="es-CO"/>
           </a:p>
@@ -1403,7 +1404,7 @@
           <a:p>
             <a:fld id="{BD986248-06F7-A441-A47A-264EBD310E11}" type="datetimeFigureOut">
               <a:rPr lang="es-CO" smtClean="0"/>
-              <a:t>27/08/2025</a:t>
+              <a:t>30/08/2025</a:t>
             </a:fld>
             <a:endParaRPr lang="es-CO"/>
           </a:p>
@@ -1603,7 +1604,7 @@
           <a:p>
             <a:fld id="{BD986248-06F7-A441-A47A-264EBD310E11}" type="datetimeFigureOut">
               <a:rPr lang="es-CO" smtClean="0"/>
-              <a:t>27/08/2025</a:t>
+              <a:t>30/08/2025</a:t>
             </a:fld>
             <a:endParaRPr lang="es-CO"/>
           </a:p>
@@ -1879,7 +1880,7 @@
           <a:p>
             <a:fld id="{BD986248-06F7-A441-A47A-264EBD310E11}" type="datetimeFigureOut">
               <a:rPr lang="es-CO" smtClean="0"/>
-              <a:t>27/08/2025</a:t>
+              <a:t>30/08/2025</a:t>
             </a:fld>
             <a:endParaRPr lang="es-CO"/>
           </a:p>
@@ -2147,7 +2148,7 @@
           <a:p>
             <a:fld id="{BD986248-06F7-A441-A47A-264EBD310E11}" type="datetimeFigureOut">
               <a:rPr lang="es-CO" smtClean="0"/>
-              <a:t>27/08/2025</a:t>
+              <a:t>30/08/2025</a:t>
             </a:fld>
             <a:endParaRPr lang="es-CO"/>
           </a:p>
@@ -2562,7 +2563,7 @@
           <a:p>
             <a:fld id="{BD986248-06F7-A441-A47A-264EBD310E11}" type="datetimeFigureOut">
               <a:rPr lang="es-CO" smtClean="0"/>
-              <a:t>27/08/2025</a:t>
+              <a:t>30/08/2025</a:t>
             </a:fld>
             <a:endParaRPr lang="es-CO"/>
           </a:p>
@@ -2704,7 +2705,7 @@
           <a:p>
             <a:fld id="{BD986248-06F7-A441-A47A-264EBD310E11}" type="datetimeFigureOut">
               <a:rPr lang="es-CO" smtClean="0"/>
-              <a:t>27/08/2025</a:t>
+              <a:t>30/08/2025</a:t>
             </a:fld>
             <a:endParaRPr lang="es-CO"/>
           </a:p>
@@ -2817,7 +2818,7 @@
           <a:p>
             <a:fld id="{BD986248-06F7-A441-A47A-264EBD310E11}" type="datetimeFigureOut">
               <a:rPr lang="es-CO" smtClean="0"/>
-              <a:t>27/08/2025</a:t>
+              <a:t>30/08/2025</a:t>
             </a:fld>
             <a:endParaRPr lang="es-CO"/>
           </a:p>
@@ -3146,7 +3147,7 @@
           <a:p>
             <a:fld id="{BD986248-06F7-A441-A47A-264EBD310E11}" type="datetimeFigureOut">
               <a:rPr lang="es-CO" smtClean="0"/>
-              <a:t>27/08/2025</a:t>
+              <a:t>30/08/2025</a:t>
             </a:fld>
             <a:endParaRPr lang="es-CO"/>
           </a:p>
@@ -3435,7 +3436,7 @@
           <a:p>
             <a:fld id="{BD986248-06F7-A441-A47A-264EBD310E11}" type="datetimeFigureOut">
               <a:rPr lang="es-CO" smtClean="0"/>
-              <a:t>27/08/2025</a:t>
+              <a:t>30/08/2025</a:t>
             </a:fld>
             <a:endParaRPr lang="es-CO"/>
           </a:p>
@@ -3678,7 +3679,7 @@
           <a:p>
             <a:fld id="{BD986248-06F7-A441-A47A-264EBD310E11}" type="datetimeFigureOut">
               <a:rPr lang="es-CO" smtClean="0"/>
-              <a:t>27/08/2025</a:t>
+              <a:t>30/08/2025</a:t>
             </a:fld>
             <a:endParaRPr lang="es-CO"/>
           </a:p>
@@ -5455,20 +5456,6 @@
 <file path=ppt/slides/slide6.xml><?xml version="1.0" encoding="utf-8"?>
 <p:sld xmlns:a="http://schemas.openxmlformats.org/drawingml/2006/main" xmlns:r="http://schemas.openxmlformats.org/officeDocument/2006/relationships" xmlns:p="http://schemas.openxmlformats.org/presentationml/2006/main">
   <p:cSld>
-    <p:bg>
-      <p:bgPr>
-        <a:blipFill dpi="0" rotWithShape="1">
-          <a:blip r:embed="rId2">
-            <a:lum/>
-          </a:blip>
-          <a:srcRect/>
-          <a:stretch>
-            <a:fillRect/>
-          </a:stretch>
-        </a:blipFill>
-        <a:effectLst/>
-      </p:bgPr>
-    </p:bg>
     <p:spTree>
       <p:nvGrpSpPr>
         <p:cNvPr id="1" name=""/>
@@ -5483,251 +5470,42 @@
           <a:chExt cx="0" cy="0"/>
         </a:xfrm>
       </p:grpSpPr>
-      <p:sp>
-        <p:nvSpPr>
-          <p:cNvPr id="2" name="Título 1">
-            <a:extLst>
-              <a:ext uri="{FF2B5EF4-FFF2-40B4-BE49-F238E27FC236}">
-                <a16:creationId xmlns:a16="http://schemas.microsoft.com/office/drawing/2014/main" id="{2ACE75F1-F343-8856-BC69-4BB6B82BF3E4}"/>
-              </a:ext>
-            </a:extLst>
-          </p:cNvPr>
-          <p:cNvSpPr txBox="1">
-            <a:spLocks/>
-          </p:cNvSpPr>
+      <p:pic>
+        <p:nvPicPr>
+          <p:cNvPr id="4" name="Imagen 3">
+            <a:extLst>
+              <a:ext uri="{FF2B5EF4-FFF2-40B4-BE49-F238E27FC236}">
+                <a16:creationId xmlns:a16="http://schemas.microsoft.com/office/drawing/2014/main" id="{A09E854F-9B53-A812-C491-601ACAA432DA}"/>
+              </a:ext>
+            </a:extLst>
+          </p:cNvPr>
+          <p:cNvPicPr>
+            <a:picLocks noChangeAspect="1"/>
+          </p:cNvPicPr>
           <p:nvPr/>
-        </p:nvSpPr>
+        </p:nvPicPr>
+        <p:blipFill>
+          <a:blip r:embed="rId2"/>
+          <a:stretch>
+            <a:fillRect/>
+          </a:stretch>
+        </p:blipFill>
         <p:spPr>
           <a:xfrm>
-            <a:off x="865669" y="555343"/>
-            <a:ext cx="9815809" cy="741563"/>
+            <a:off x="441684" y="2101238"/>
+            <a:ext cx="5372262" cy="3646333"/>
           </a:xfrm>
           <a:prstGeom prst="rect">
             <a:avLst/>
           </a:prstGeom>
-          <a:ln>
-            <a:noFill/>
-          </a:ln>
         </p:spPr>
-        <p:txBody>
-          <a:bodyPr/>
-          <a:lstStyle>
-            <a:lvl1pPr algn="l" defTabSz="914400" rtl="0" eaLnBrk="1" latinLnBrk="0" hangingPunct="1">
-              <a:lnSpc>
-                <a:spcPct val="90000"/>
-              </a:lnSpc>
-              <a:spcBef>
-                <a:spcPct val="0"/>
-              </a:spcBef>
-              <a:buNone/>
-              <a:defRPr sz="4400" kern="1200">
-                <a:solidFill>
-                  <a:schemeClr val="tx1"/>
-                </a:solidFill>
-                <a:latin typeface="+mj-lt"/>
-                <a:ea typeface="+mj-ea"/>
-                <a:cs typeface="+mj-cs"/>
-              </a:defRPr>
-            </a:lvl1pPr>
-          </a:lstStyle>
-          <a:p>
-            <a:pPr marL="0" marR="0" lvl="0" indent="0" algn="l" defTabSz="914400" rtl="0" eaLnBrk="1" fontAlgn="auto" latinLnBrk="0" hangingPunct="1">
-              <a:lnSpc>
-                <a:spcPct val="90000"/>
-              </a:lnSpc>
-              <a:spcBef>
-                <a:spcPct val="0"/>
-              </a:spcBef>
-              <a:spcAft>
-                <a:spcPts val="0"/>
-              </a:spcAft>
-              <a:buClrTx/>
-              <a:buSzTx/>
-              <a:buFontTx/>
-              <a:buNone/>
-              <a:tabLst/>
-              <a:defRPr/>
-            </a:pPr>
-            <a:r>
-              <a:rPr lang="es-CO" sz="3600" b="1" dirty="0">
-                <a:solidFill>
-                  <a:srgbClr val="4D4D4C"/>
-                </a:solidFill>
-                <a:latin typeface="WORK SANS BOLD ROMAN" pitchFamily="2" charset="77"/>
-              </a:rPr>
-              <a:t>Dificultades</a:t>
-            </a:r>
-            <a:endParaRPr kumimoji="0" lang="es-CO" sz="3600" b="1" u="none" strike="noStrike" kern="1200" cap="none" spc="0" normalizeH="0" baseline="0" noProof="0" dirty="0">
-              <a:ln>
-                <a:noFill/>
-              </a:ln>
-              <a:solidFill>
-                <a:srgbClr val="4D4D4C"/>
-              </a:solidFill>
-              <a:effectLst/>
-              <a:uLnTx/>
-              <a:uFillTx/>
-              <a:latin typeface="WORK SANS BOLD ROMAN" pitchFamily="2" charset="77"/>
-            </a:endParaRPr>
-          </a:p>
-        </p:txBody>
-      </p:sp>
-      <p:sp>
-        <p:nvSpPr>
-          <p:cNvPr id="3" name="CuadroTexto 2">
-            <a:extLst>
-              <a:ext uri="{FF2B5EF4-FFF2-40B4-BE49-F238E27FC236}">
-                <a16:creationId xmlns:a16="http://schemas.microsoft.com/office/drawing/2014/main" id="{A6C31FC2-6C63-0CB9-C78D-1723D5E9DD66}"/>
-              </a:ext>
-            </a:extLst>
-          </p:cNvPr>
-          <p:cNvSpPr txBox="1"/>
-          <p:nvPr/>
-        </p:nvSpPr>
-        <p:spPr>
-          <a:xfrm>
-            <a:off x="688247" y="1774578"/>
-            <a:ext cx="5518437" cy="3847207"/>
-          </a:xfrm>
-          <a:prstGeom prst="rect">
-            <a:avLst/>
-          </a:prstGeom>
-          <a:noFill/>
-        </p:spPr>
-        <p:txBody>
-          <a:bodyPr wrap="square" rtlCol="0">
-            <a:spAutoFit/>
-          </a:bodyPr>
-          <a:lstStyle/>
-          <a:p>
-            <a:pPr marL="342900" indent="-342900" algn="just">
-              <a:buAutoNum type="arabicPeriod"/>
-            </a:pPr>
-            <a:r>
-              <a:rPr lang="es-ES" sz="1600" dirty="0">
-                <a:latin typeface="Work Sans Light Roman" pitchFamily="2" charset="77"/>
-              </a:rPr>
-              <a:t>Al utilizar la propiedad </a:t>
-            </a:r>
-            <a:r>
-              <a:rPr lang="es-ES" sz="1600" dirty="0" err="1">
-                <a:latin typeface="Work Sans Light Roman" pitchFamily="2" charset="77"/>
-              </a:rPr>
-              <a:t>Flexbox</a:t>
-            </a:r>
-            <a:r>
-              <a:rPr lang="es-ES" sz="1600" dirty="0">
-                <a:latin typeface="Work Sans Light Roman" pitchFamily="2" charset="77"/>
-              </a:rPr>
-              <a:t>, el contenido de las tarjetas se separó de las imágenes, lo que obligó a realizar ajustes adicionales en la maquetación. Para organizar las tarjetas en fila fue necesario aplicar las propiedades </a:t>
-            </a:r>
-            <a:r>
-              <a:rPr lang="es-ES" sz="1600" dirty="0" err="1">
-                <a:latin typeface="Work Sans Light Roman" pitchFamily="2" charset="77"/>
-              </a:rPr>
-              <a:t>flex-direction</a:t>
-            </a:r>
-            <a:r>
-              <a:rPr lang="es-ES" sz="1600" dirty="0">
-                <a:latin typeface="Work Sans Light Roman" pitchFamily="2" charset="77"/>
-              </a:rPr>
-              <a:t> y </a:t>
-            </a:r>
-            <a:r>
-              <a:rPr lang="es-ES" sz="1600" dirty="0" err="1">
-                <a:latin typeface="Work Sans Light Roman" pitchFamily="2" charset="77"/>
-              </a:rPr>
-              <a:t>flex-wrap</a:t>
-            </a:r>
-            <a:r>
-              <a:rPr lang="es-ES" sz="1600" dirty="0">
-                <a:latin typeface="Work Sans Light Roman" pitchFamily="2" charset="77"/>
-              </a:rPr>
-              <a:t>.</a:t>
-            </a:r>
-          </a:p>
-          <a:p>
-            <a:pPr marL="342900" indent="-342900" algn="just">
-              <a:buAutoNum type="arabicPeriod"/>
-            </a:pPr>
-            <a:r>
-              <a:rPr lang="es-ES" sz="1600" dirty="0">
-                <a:latin typeface="Work Sans Light Roman" pitchFamily="2" charset="77"/>
-              </a:rPr>
-              <a:t>La alineación vertical de los elementos puede resultar confusa al combinar propiedades como </a:t>
-            </a:r>
-            <a:r>
-              <a:rPr lang="es-ES" sz="1600" dirty="0" err="1">
-                <a:latin typeface="Work Sans Light Roman" pitchFamily="2" charset="77"/>
-              </a:rPr>
-              <a:t>align-items</a:t>
-            </a:r>
-            <a:r>
-              <a:rPr lang="es-ES" sz="1600" dirty="0">
-                <a:latin typeface="Work Sans Light Roman" pitchFamily="2" charset="77"/>
-              </a:rPr>
-              <a:t> y </a:t>
-            </a:r>
-            <a:r>
-              <a:rPr lang="es-ES" sz="1600" dirty="0" err="1">
-                <a:latin typeface="Work Sans Light Roman" pitchFamily="2" charset="77"/>
-              </a:rPr>
-              <a:t>justify-content</a:t>
-            </a:r>
-            <a:r>
-              <a:rPr lang="es-ES" sz="1600" dirty="0">
-                <a:latin typeface="Work Sans Light Roman" pitchFamily="2" charset="77"/>
-              </a:rPr>
-              <a:t>.</a:t>
-            </a:r>
-          </a:p>
-          <a:p>
-            <a:pPr marL="342900" indent="-342900" algn="just">
-              <a:buAutoNum type="arabicPeriod"/>
-            </a:pPr>
-            <a:r>
-              <a:rPr lang="es-ES" sz="1600" dirty="0">
-                <a:latin typeface="Work Sans Light Roman" pitchFamily="2" charset="77"/>
-              </a:rPr>
-              <a:t>En diseños con muchos elementos, algunos contenedores no se ajustan como se espera, lo que genera desbordes o espacios vacíos.</a:t>
-            </a:r>
-          </a:p>
-          <a:p>
-            <a:pPr marL="342900" indent="-342900" algn="just">
-              <a:buAutoNum type="arabicPeriod"/>
-            </a:pPr>
-            <a:r>
-              <a:rPr lang="es-ES" sz="1600" dirty="0"/>
-              <a:t>La compatibilidad entre navegadores antiguos puede ocasionar inconsistencias en la visualización.</a:t>
-            </a:r>
-            <a:endParaRPr lang="es-CO" sz="1600" dirty="0">
-              <a:latin typeface="Work Sans Light Roman" pitchFamily="2" charset="77"/>
-            </a:endParaRPr>
-          </a:p>
-          <a:p>
-            <a:pPr marL="342900" indent="-342900">
-              <a:buAutoNum type="arabicPeriod"/>
-            </a:pPr>
-            <a:endParaRPr lang="es-CO" sz="1600" dirty="0">
-              <a:latin typeface="Work Sans Light Roman" pitchFamily="2" charset="77"/>
-            </a:endParaRPr>
-          </a:p>
-          <a:p>
-            <a:pPr marL="342900" indent="-342900">
-              <a:buAutoNum type="arabicPeriod"/>
-            </a:pPr>
-            <a:endParaRPr lang="es-CO" sz="1600" dirty="0">
-              <a:latin typeface="Work Sans Light Roman" pitchFamily="2" charset="77"/>
-            </a:endParaRPr>
-          </a:p>
-        </p:txBody>
-      </p:sp>
+      </p:pic>
       <p:pic>
         <p:nvPicPr>
-          <p:cNvPr id="6" name="Imagen 5" descr="Pantalla azul con letras blancas&#10;&#10;El contenido generado por IA puede ser incorrecto.">
-            <a:extLst>
-              <a:ext uri="{FF2B5EF4-FFF2-40B4-BE49-F238E27FC236}">
-                <a16:creationId xmlns:a16="http://schemas.microsoft.com/office/drawing/2014/main" id="{A89E6AD6-2DF5-D0A3-B7EA-740ED22B1797}"/>
+          <p:cNvPr id="6" name="Imagen 5">
+            <a:extLst>
+              <a:ext uri="{FF2B5EF4-FFF2-40B4-BE49-F238E27FC236}">
+                <a16:creationId xmlns:a16="http://schemas.microsoft.com/office/drawing/2014/main" id="{B984AB62-3BF5-468A-C798-1CFB9C6406A9}"/>
               </a:ext>
             </a:extLst>
           </p:cNvPr>
@@ -5744,18 +5522,73 @@
         </p:blipFill>
         <p:spPr>
           <a:xfrm>
-            <a:off x="6691939" y="1818202"/>
-            <a:ext cx="5210125" cy="3221595"/>
+            <a:off x="6096000" y="2101238"/>
+            <a:ext cx="5485078" cy="3646333"/>
           </a:xfrm>
           <a:prstGeom prst="rect">
             <a:avLst/>
           </a:prstGeom>
         </p:spPr>
       </p:pic>
+      <p:sp>
+        <p:nvSpPr>
+          <p:cNvPr id="16" name="CuadroTexto 15">
+            <a:extLst>
+              <a:ext uri="{FF2B5EF4-FFF2-40B4-BE49-F238E27FC236}">
+                <a16:creationId xmlns:a16="http://schemas.microsoft.com/office/drawing/2014/main" id="{8BE38E47-88E2-45E8-8950-9EE341249105}"/>
+              </a:ext>
+            </a:extLst>
+          </p:cNvPr>
+          <p:cNvSpPr txBox="1"/>
+          <p:nvPr/>
+        </p:nvSpPr>
+        <p:spPr>
+          <a:xfrm>
+            <a:off x="754040" y="430611"/>
+            <a:ext cx="3640539" cy="646331"/>
+          </a:xfrm>
+          <a:prstGeom prst="rect">
+            <a:avLst/>
+          </a:prstGeom>
+          <a:noFill/>
+        </p:spPr>
+        <p:txBody>
+          <a:bodyPr wrap="square">
+            <a:spAutoFit/>
+          </a:bodyPr>
+          <a:lstStyle/>
+          <a:p>
+            <a:r>
+              <a:rPr lang="es-ES" sz="3600" dirty="0">
+                <a:solidFill>
+                  <a:schemeClr val="bg1"/>
+                </a:solidFill>
+                <a:latin typeface="Work Sans Bold Roman"/>
+              </a:rPr>
+              <a:t>F</a:t>
+            </a:r>
+            <a:r>
+              <a:rPr lang="es-CO" sz="3600" dirty="0" err="1">
+                <a:solidFill>
+                  <a:schemeClr val="bg1"/>
+                </a:solidFill>
+                <a:latin typeface="Work Sans Bold Roman"/>
+              </a:rPr>
+              <a:t>ormularios</a:t>
+            </a:r>
+            <a:endParaRPr lang="es-CO" sz="3600" dirty="0">
+              <a:solidFill>
+                <a:schemeClr val="bg1"/>
+              </a:solidFill>
+              <a:latin typeface="Work Sans Bold Roman"/>
+            </a:endParaRPr>
+          </a:p>
+        </p:txBody>
+      </p:sp>
     </p:spTree>
     <p:extLst>
       <p:ext uri="{BB962C8B-B14F-4D97-AF65-F5344CB8AC3E}">
-        <p14:creationId xmlns:p14="http://schemas.microsoft.com/office/powerpoint/2010/main" val="458058105"/>
+        <p14:creationId xmlns:p14="http://schemas.microsoft.com/office/powerpoint/2010/main" val="1920389836"/>
       </p:ext>
     </p:extLst>
   </p:cSld>
@@ -5798,10 +5631,10 @@
       </p:grpSpPr>
       <p:sp>
         <p:nvSpPr>
-          <p:cNvPr id="3" name="Título 1">
-            <a:extLst>
-              <a:ext uri="{FF2B5EF4-FFF2-40B4-BE49-F238E27FC236}">
-                <a16:creationId xmlns:a16="http://schemas.microsoft.com/office/drawing/2014/main" id="{BB6F714C-A6B0-54AE-507A-D0700714D94B}"/>
+          <p:cNvPr id="2" name="Título 1">
+            <a:extLst>
+              <a:ext uri="{FF2B5EF4-FFF2-40B4-BE49-F238E27FC236}">
+                <a16:creationId xmlns:a16="http://schemas.microsoft.com/office/drawing/2014/main" id="{2ACE75F1-F343-8856-BC69-4BB6B82BF3E4}"/>
               </a:ext>
             </a:extLst>
           </p:cNvPr>
@@ -5812,12 +5645,15 @@
         </p:nvSpPr>
         <p:spPr>
           <a:xfrm>
-            <a:off x="456236" y="416690"/>
-            <a:ext cx="9815809" cy="527874"/>
+            <a:off x="865669" y="555343"/>
+            <a:ext cx="9815809" cy="741563"/>
           </a:xfrm>
           <a:prstGeom prst="rect">
             <a:avLst/>
           </a:prstGeom>
+          <a:ln>
+            <a:noFill/>
+          </a:ln>
         </p:spPr>
         <p:txBody>
           <a:bodyPr/>
@@ -5859,29 +5695,20 @@
               <a:defRPr/>
             </a:pPr>
             <a:r>
-              <a:rPr lang="es-ES" sz="3600" b="1" dirty="0">
+              <a:rPr lang="es-CO" sz="3600" b="1" dirty="0">
                 <a:solidFill>
-                  <a:prstClr val="white"/>
+                  <a:srgbClr val="4D4D4C"/>
                 </a:solidFill>
                 <a:latin typeface="WORK SANS BOLD ROMAN" pitchFamily="2" charset="77"/>
               </a:rPr>
-              <a:t>R</a:t>
-            </a:r>
-            <a:r>
-              <a:rPr lang="es-CO" sz="3600" b="1" dirty="0" err="1">
-                <a:solidFill>
-                  <a:prstClr val="white"/>
-                </a:solidFill>
-                <a:latin typeface="WORK SANS BOLD ROMAN" pitchFamily="2" charset="77"/>
-              </a:rPr>
-              <a:t>esultados</a:t>
+              <a:t>Dificultades</a:t>
             </a:r>
             <a:endParaRPr kumimoji="0" lang="es-CO" sz="3600" b="1" u="none" strike="noStrike" kern="1200" cap="none" spc="0" normalizeH="0" baseline="0" noProof="0" dirty="0">
               <a:ln>
                 <a:noFill/>
               </a:ln>
               <a:solidFill>
-                <a:prstClr val="white"/>
+                <a:srgbClr val="4D4D4C"/>
               </a:solidFill>
               <a:effectLst/>
               <a:uLnTx/>
@@ -5891,12 +5718,162 @@
           </a:p>
         </p:txBody>
       </p:sp>
+      <p:sp>
+        <p:nvSpPr>
+          <p:cNvPr id="3" name="CuadroTexto 2">
+            <a:extLst>
+              <a:ext uri="{FF2B5EF4-FFF2-40B4-BE49-F238E27FC236}">
+                <a16:creationId xmlns:a16="http://schemas.microsoft.com/office/drawing/2014/main" id="{A6C31FC2-6C63-0CB9-C78D-1723D5E9DD66}"/>
+              </a:ext>
+            </a:extLst>
+          </p:cNvPr>
+          <p:cNvSpPr txBox="1"/>
+          <p:nvPr/>
+        </p:nvSpPr>
+        <p:spPr>
+          <a:xfrm>
+            <a:off x="688247" y="1774578"/>
+            <a:ext cx="5518437" cy="3847207"/>
+          </a:xfrm>
+          <a:prstGeom prst="rect">
+            <a:avLst/>
+          </a:prstGeom>
+          <a:noFill/>
+        </p:spPr>
+        <p:txBody>
+          <a:bodyPr wrap="square" rtlCol="0">
+            <a:spAutoFit/>
+          </a:bodyPr>
+          <a:lstStyle/>
+          <a:p>
+            <a:pPr marL="342900" indent="-342900" algn="just">
+              <a:buAutoNum type="arabicPeriod"/>
+            </a:pPr>
+            <a:r>
+              <a:rPr lang="es-ES" sz="1600" dirty="0">
+                <a:latin typeface="Work Sans Light Roman" pitchFamily="2" charset="77"/>
+              </a:rPr>
+              <a:t>Al utilizar la propiedad </a:t>
+            </a:r>
+            <a:r>
+              <a:rPr lang="es-ES" sz="1600" dirty="0" err="1">
+                <a:latin typeface="Work Sans Light Roman" pitchFamily="2" charset="77"/>
+              </a:rPr>
+              <a:t>Flexbox</a:t>
+            </a:r>
+            <a:r>
+              <a:rPr lang="es-ES" sz="1600" dirty="0">
+                <a:latin typeface="Work Sans Light Roman" pitchFamily="2" charset="77"/>
+              </a:rPr>
+              <a:t>, el contenido de las tarjetas se separó de las imágenes, lo que obligó a realizar ajustes adicionales en la maquetación. Para organizar las tarjetas en fila fue necesario aplicar las propiedades </a:t>
+            </a:r>
+            <a:r>
+              <a:rPr lang="es-ES" sz="1600" dirty="0" err="1">
+                <a:latin typeface="Work Sans Light Roman" pitchFamily="2" charset="77"/>
+              </a:rPr>
+              <a:t>flex-direction</a:t>
+            </a:r>
+            <a:r>
+              <a:rPr lang="es-ES" sz="1600" dirty="0">
+                <a:latin typeface="Work Sans Light Roman" pitchFamily="2" charset="77"/>
+              </a:rPr>
+              <a:t> y </a:t>
+            </a:r>
+            <a:r>
+              <a:rPr lang="es-ES" sz="1600" dirty="0" err="1">
+                <a:latin typeface="Work Sans Light Roman" pitchFamily="2" charset="77"/>
+              </a:rPr>
+              <a:t>flex-wrap</a:t>
+            </a:r>
+            <a:r>
+              <a:rPr lang="es-ES" sz="1600" dirty="0">
+                <a:latin typeface="Work Sans Light Roman" pitchFamily="2" charset="77"/>
+              </a:rPr>
+              <a:t>.</a:t>
+            </a:r>
+          </a:p>
+          <a:p>
+            <a:pPr marL="342900" indent="-342900" algn="just">
+              <a:buAutoNum type="arabicPeriod"/>
+            </a:pPr>
+            <a:r>
+              <a:rPr lang="es-ES" sz="1600" dirty="0">
+                <a:latin typeface="Work Sans Light Roman" pitchFamily="2" charset="77"/>
+              </a:rPr>
+              <a:t>La alineación vertical de los elementos puede resultar confusa al combinar propiedades como </a:t>
+            </a:r>
+            <a:r>
+              <a:rPr lang="es-ES" sz="1600" dirty="0" err="1">
+                <a:latin typeface="Work Sans Light Roman" pitchFamily="2" charset="77"/>
+              </a:rPr>
+              <a:t>align-items</a:t>
+            </a:r>
+            <a:r>
+              <a:rPr lang="es-ES" sz="1600" dirty="0">
+                <a:latin typeface="Work Sans Light Roman" pitchFamily="2" charset="77"/>
+              </a:rPr>
+              <a:t> y </a:t>
+            </a:r>
+            <a:r>
+              <a:rPr lang="es-ES" sz="1600" dirty="0" err="1">
+                <a:latin typeface="Work Sans Light Roman" pitchFamily="2" charset="77"/>
+              </a:rPr>
+              <a:t>justify-content</a:t>
+            </a:r>
+            <a:r>
+              <a:rPr lang="es-ES" sz="1600" dirty="0">
+                <a:latin typeface="Work Sans Light Roman" pitchFamily="2" charset="77"/>
+              </a:rPr>
+              <a:t>.</a:t>
+            </a:r>
+          </a:p>
+          <a:p>
+            <a:pPr marL="342900" indent="-342900" algn="just">
+              <a:buAutoNum type="arabicPeriod"/>
+            </a:pPr>
+            <a:r>
+              <a:rPr lang="es-ES" sz="1600" dirty="0">
+                <a:latin typeface="Work Sans Light Roman" pitchFamily="2" charset="77"/>
+              </a:rPr>
+              <a:t>En diseños con muchos elementos, algunos contenedores no se ajustan como se espera, lo que genera desbordes o espacios vacíos.</a:t>
+            </a:r>
+          </a:p>
+          <a:p>
+            <a:pPr marL="342900" indent="-342900" algn="just">
+              <a:buAutoNum type="arabicPeriod"/>
+            </a:pPr>
+            <a:r>
+              <a:rPr lang="es-ES" sz="1600" dirty="0"/>
+              <a:t>La compatibilidad entre navegadores antiguos puede ocasionar inconsistencias en la visualización.</a:t>
+            </a:r>
+            <a:endParaRPr lang="es-CO" sz="1600" dirty="0">
+              <a:latin typeface="Work Sans Light Roman" pitchFamily="2" charset="77"/>
+            </a:endParaRPr>
+          </a:p>
+          <a:p>
+            <a:pPr marL="342900" indent="-342900">
+              <a:buAutoNum type="arabicPeriod"/>
+            </a:pPr>
+            <a:endParaRPr lang="es-CO" sz="1600" dirty="0">
+              <a:latin typeface="Work Sans Light Roman" pitchFamily="2" charset="77"/>
+            </a:endParaRPr>
+          </a:p>
+          <a:p>
+            <a:pPr marL="342900" indent="-342900">
+              <a:buAutoNum type="arabicPeriod"/>
+            </a:pPr>
+            <a:endParaRPr lang="es-CO" sz="1600" dirty="0">
+              <a:latin typeface="Work Sans Light Roman" pitchFamily="2" charset="77"/>
+            </a:endParaRPr>
+          </a:p>
+        </p:txBody>
+      </p:sp>
       <p:pic>
         <p:nvPicPr>
-          <p:cNvPr id="4" name="Imagen 3">
-            <a:extLst>
-              <a:ext uri="{FF2B5EF4-FFF2-40B4-BE49-F238E27FC236}">
-                <a16:creationId xmlns:a16="http://schemas.microsoft.com/office/drawing/2014/main" id="{A065F58A-46D6-4B59-B410-86080F169C22}"/>
+          <p:cNvPr id="6" name="Imagen 5" descr="Pantalla azul con letras blancas&#10;&#10;El contenido generado por IA puede ser incorrecto.">
+            <a:extLst>
+              <a:ext uri="{FF2B5EF4-FFF2-40B4-BE49-F238E27FC236}">
+                <a16:creationId xmlns:a16="http://schemas.microsoft.com/office/drawing/2014/main" id="{A89E6AD6-2DF5-D0A3-B7EA-740ED22B1797}"/>
               </a:ext>
             </a:extLst>
           </p:cNvPr>
@@ -5913,7 +5890,176 @@
         </p:blipFill>
         <p:spPr>
           <a:xfrm>
-            <a:off x="1520762" y="3719016"/>
+            <a:off x="6691939" y="1818202"/>
+            <a:ext cx="5210125" cy="3221595"/>
+          </a:xfrm>
+          <a:prstGeom prst="rect">
+            <a:avLst/>
+          </a:prstGeom>
+        </p:spPr>
+      </p:pic>
+    </p:spTree>
+    <p:extLst>
+      <p:ext uri="{BB962C8B-B14F-4D97-AF65-F5344CB8AC3E}">
+        <p14:creationId xmlns:p14="http://schemas.microsoft.com/office/powerpoint/2010/main" val="458058105"/>
+      </p:ext>
+    </p:extLst>
+  </p:cSld>
+  <p:clrMapOvr>
+    <a:masterClrMapping/>
+  </p:clrMapOvr>
+</p:sld>
+</file>
+
+<file path=ppt/slides/slide8.xml><?xml version="1.0" encoding="utf-8"?>
+<p:sld xmlns:a="http://schemas.openxmlformats.org/drawingml/2006/main" xmlns:r="http://schemas.openxmlformats.org/officeDocument/2006/relationships" xmlns:p="http://schemas.openxmlformats.org/presentationml/2006/main">
+  <p:cSld>
+    <p:bg>
+      <p:bgPr>
+        <a:blipFill dpi="0" rotWithShape="1">
+          <a:blip r:embed="rId2">
+            <a:lum/>
+          </a:blip>
+          <a:srcRect/>
+          <a:stretch>
+            <a:fillRect/>
+          </a:stretch>
+        </a:blipFill>
+        <a:effectLst/>
+      </p:bgPr>
+    </p:bg>
+    <p:spTree>
+      <p:nvGrpSpPr>
+        <p:cNvPr id="1" name=""/>
+        <p:cNvGrpSpPr/>
+        <p:nvPr/>
+      </p:nvGrpSpPr>
+      <p:grpSpPr>
+        <a:xfrm>
+          <a:off x="0" y="0"/>
+          <a:ext cx="0" cy="0"/>
+          <a:chOff x="0" y="0"/>
+          <a:chExt cx="0" cy="0"/>
+        </a:xfrm>
+      </p:grpSpPr>
+      <p:sp>
+        <p:nvSpPr>
+          <p:cNvPr id="3" name="Título 1">
+            <a:extLst>
+              <a:ext uri="{FF2B5EF4-FFF2-40B4-BE49-F238E27FC236}">
+                <a16:creationId xmlns:a16="http://schemas.microsoft.com/office/drawing/2014/main" id="{BB6F714C-A6B0-54AE-507A-D0700714D94B}"/>
+              </a:ext>
+            </a:extLst>
+          </p:cNvPr>
+          <p:cNvSpPr txBox="1">
+            <a:spLocks/>
+          </p:cNvSpPr>
+          <p:nvPr/>
+        </p:nvSpPr>
+        <p:spPr>
+          <a:xfrm>
+            <a:off x="456236" y="416690"/>
+            <a:ext cx="9815809" cy="527874"/>
+          </a:xfrm>
+          <a:prstGeom prst="rect">
+            <a:avLst/>
+          </a:prstGeom>
+        </p:spPr>
+        <p:txBody>
+          <a:bodyPr/>
+          <a:lstStyle>
+            <a:lvl1pPr algn="l" defTabSz="914400" rtl="0" eaLnBrk="1" latinLnBrk="0" hangingPunct="1">
+              <a:lnSpc>
+                <a:spcPct val="90000"/>
+              </a:lnSpc>
+              <a:spcBef>
+                <a:spcPct val="0"/>
+              </a:spcBef>
+              <a:buNone/>
+              <a:defRPr sz="4400" kern="1200">
+                <a:solidFill>
+                  <a:schemeClr val="tx1"/>
+                </a:solidFill>
+                <a:latin typeface="+mj-lt"/>
+                <a:ea typeface="+mj-ea"/>
+                <a:cs typeface="+mj-cs"/>
+              </a:defRPr>
+            </a:lvl1pPr>
+          </a:lstStyle>
+          <a:p>
+            <a:pPr marL="0" marR="0" lvl="0" indent="0" algn="l" defTabSz="914400" rtl="0" eaLnBrk="1" fontAlgn="auto" latinLnBrk="0" hangingPunct="1">
+              <a:lnSpc>
+                <a:spcPct val="90000"/>
+              </a:lnSpc>
+              <a:spcBef>
+                <a:spcPct val="0"/>
+              </a:spcBef>
+              <a:spcAft>
+                <a:spcPts val="0"/>
+              </a:spcAft>
+              <a:buClrTx/>
+              <a:buSzTx/>
+              <a:buFontTx/>
+              <a:buNone/>
+              <a:tabLst/>
+              <a:defRPr/>
+            </a:pPr>
+            <a:r>
+              <a:rPr lang="es-ES" sz="3600" b="1" dirty="0">
+                <a:solidFill>
+                  <a:prstClr val="white"/>
+                </a:solidFill>
+                <a:latin typeface="WORK SANS BOLD ROMAN" pitchFamily="2" charset="77"/>
+              </a:rPr>
+              <a:t>R</a:t>
+            </a:r>
+            <a:r>
+              <a:rPr lang="es-CO" sz="3600" b="1" dirty="0" err="1">
+                <a:solidFill>
+                  <a:prstClr val="white"/>
+                </a:solidFill>
+                <a:latin typeface="WORK SANS BOLD ROMAN" pitchFamily="2" charset="77"/>
+              </a:rPr>
+              <a:t>esultados</a:t>
+            </a:r>
+            <a:endParaRPr kumimoji="0" lang="es-CO" sz="3600" b="1" u="none" strike="noStrike" kern="1200" cap="none" spc="0" normalizeH="0" baseline="0" noProof="0" dirty="0">
+              <a:ln>
+                <a:noFill/>
+              </a:ln>
+              <a:solidFill>
+                <a:prstClr val="white"/>
+              </a:solidFill>
+              <a:effectLst/>
+              <a:uLnTx/>
+              <a:uFillTx/>
+              <a:latin typeface="WORK SANS BOLD ROMAN" pitchFamily="2" charset="77"/>
+            </a:endParaRPr>
+          </a:p>
+        </p:txBody>
+      </p:sp>
+      <p:pic>
+        <p:nvPicPr>
+          <p:cNvPr id="4" name="Imagen 3">
+            <a:extLst>
+              <a:ext uri="{FF2B5EF4-FFF2-40B4-BE49-F238E27FC236}">
+                <a16:creationId xmlns:a16="http://schemas.microsoft.com/office/drawing/2014/main" id="{A065F58A-46D6-4B59-B410-86080F169C22}"/>
+              </a:ext>
+            </a:extLst>
+          </p:cNvPr>
+          <p:cNvPicPr>
+            <a:picLocks noChangeAspect="1"/>
+          </p:cNvPicPr>
+          <p:nvPr/>
+        </p:nvPicPr>
+        <p:blipFill>
+          <a:blip r:embed="rId3"/>
+          <a:stretch>
+            <a:fillRect/>
+          </a:stretch>
+        </p:blipFill>
+        <p:spPr>
+          <a:xfrm>
+            <a:off x="179337" y="3931633"/>
             <a:ext cx="6546019" cy="2346879"/>
           </a:xfrm>
           <a:prstGeom prst="rect">
@@ -5943,8 +6089,8 @@
         </p:blipFill>
         <p:spPr>
           <a:xfrm>
-            <a:off x="8798135" y="1378424"/>
-            <a:ext cx="2678321" cy="4967352"/>
+            <a:off x="7095362" y="1929555"/>
+            <a:ext cx="2158980" cy="4004155"/>
           </a:xfrm>
           <a:prstGeom prst="rect">
             <a:avLst/>
@@ -5965,7 +6111,7 @@
         </p:nvSpPr>
         <p:spPr>
           <a:xfrm>
-            <a:off x="1202919" y="1658003"/>
+            <a:off x="240015" y="1929555"/>
             <a:ext cx="6670344" cy="1480982"/>
           </a:xfrm>
           <a:prstGeom prst="rect">
@@ -5996,6 +6142,36 @@
           </a:p>
         </p:txBody>
       </p:sp>
+      <p:pic>
+        <p:nvPicPr>
+          <p:cNvPr id="6" name="Imagen 5">
+            <a:extLst>
+              <a:ext uri="{FF2B5EF4-FFF2-40B4-BE49-F238E27FC236}">
+                <a16:creationId xmlns:a16="http://schemas.microsoft.com/office/drawing/2014/main" id="{BD1FC3C0-8C33-EA82-94EB-8C5C2C03518B}"/>
+              </a:ext>
+            </a:extLst>
+          </p:cNvPr>
+          <p:cNvPicPr>
+            <a:picLocks noChangeAspect="1"/>
+          </p:cNvPicPr>
+          <p:nvPr/>
+        </p:nvPicPr>
+        <p:blipFill>
+          <a:blip r:embed="rId5"/>
+          <a:stretch>
+            <a:fillRect/>
+          </a:stretch>
+        </p:blipFill>
+        <p:spPr>
+          <a:xfrm>
+            <a:off x="9748673" y="1929555"/>
+            <a:ext cx="2015697" cy="4043496"/>
+          </a:xfrm>
+          <a:prstGeom prst="rect">
+            <a:avLst/>
+          </a:prstGeom>
+        </p:spPr>
+      </p:pic>
     </p:spTree>
     <p:extLst>
       <p:ext uri="{BB962C8B-B14F-4D97-AF65-F5344CB8AC3E}">
@@ -6009,7 +6185,7 @@
 </p:sld>
 </file>
 
-<file path=ppt/slides/slide8.xml><?xml version="1.0" encoding="utf-8"?>
+<file path=ppt/slides/slide9.xml><?xml version="1.0" encoding="utf-8"?>
 <p:sld xmlns:a="http://schemas.openxmlformats.org/drawingml/2006/main" xmlns:r="http://schemas.openxmlformats.org/officeDocument/2006/relationships" xmlns:p="http://schemas.openxmlformats.org/presentationml/2006/main">
   <p:cSld>
     <p:bg>
